--- a/Ledgr-problem-and-architecture.pptx
+++ b/Ledgr-problem-and-architecture.pptx
@@ -118,16 +118,39 @@
   <pc:docChgLst>
     <pc:chgData name="Amogh Nagri" userId="0296a5a14be49074" providerId="LiveId" clId="{08A3EB59-B37B-482F-9A7F-8E1D5E91179F}"/>
     <pc:docChg chg="undo custSel modSld">
-      <pc:chgData name="Amogh Nagri" userId="0296a5a14be49074" providerId="LiveId" clId="{08A3EB59-B37B-482F-9A7F-8E1D5E91179F}" dt="2026-09-05T13:14:31.032" v="6" actId="1076"/>
+      <pc:chgData name="Amogh Nagri" userId="0296a5a14be49074" providerId="LiveId" clId="{08A3EB59-B37B-482F-9A7F-8E1D5E91179F}" dt="2026-09-05T14:45:21.405" v="13" actId="1076"/>
       <pc:docMkLst>
         <pc:docMk/>
       </pc:docMkLst>
       <pc:sldChg chg="modSp mod">
-        <pc:chgData name="Amogh Nagri" userId="0296a5a14be49074" providerId="LiveId" clId="{08A3EB59-B37B-482F-9A7F-8E1D5E91179F}" dt="2026-09-05T13:14:31.032" v="6" actId="1076"/>
+        <pc:chgData name="Amogh Nagri" userId="0296a5a14be49074" providerId="LiveId" clId="{08A3EB59-B37B-482F-9A7F-8E1D5E91179F}" dt="2026-09-05T14:45:21.405" v="13" actId="1076"/>
+        <pc:sldMkLst>
+          <pc:docMk/>
+          <pc:sldMk cId="0" sldId="256"/>
+        </pc:sldMkLst>
+        <pc:spChg chg="mod">
+          <ac:chgData name="Amogh Nagri" userId="0296a5a14be49074" providerId="LiveId" clId="{08A3EB59-B37B-482F-9A7F-8E1D5E91179F}" dt="2026-09-05T14:45:21.405" v="13" actId="1076"/>
+          <ac:spMkLst>
+            <pc:docMk/>
+            <pc:sldMk cId="0" sldId="256"/>
+            <ac:spMk id="31" creationId="{00000000-0000-0000-0000-000000000000}"/>
+          </ac:spMkLst>
+        </pc:spChg>
+      </pc:sldChg>
+      <pc:sldChg chg="modSp mod">
+        <pc:chgData name="Amogh Nagri" userId="0296a5a14be49074" providerId="LiveId" clId="{08A3EB59-B37B-482F-9A7F-8E1D5E91179F}" dt="2026-09-05T13:22:00.336" v="12" actId="1076"/>
         <pc:sldMkLst>
           <pc:docMk/>
           <pc:sldMk cId="0" sldId="257"/>
         </pc:sldMkLst>
+        <pc:spChg chg="mod">
+          <ac:chgData name="Amogh Nagri" userId="0296a5a14be49074" providerId="LiveId" clId="{08A3EB59-B37B-482F-9A7F-8E1D5E91179F}" dt="2026-09-05T13:21:56.015" v="11" actId="1076"/>
+          <ac:spMkLst>
+            <pc:docMk/>
+            <pc:sldMk cId="0" sldId="257"/>
+            <ac:spMk id="8" creationId="{00000000-0000-0000-0000-000000000000}"/>
+          </ac:spMkLst>
+        </pc:spChg>
         <pc:spChg chg="mod">
           <ac:chgData name="Amogh Nagri" userId="0296a5a14be49074" providerId="LiveId" clId="{08A3EB59-B37B-482F-9A7F-8E1D5E91179F}" dt="2026-09-05T13:14:05.085" v="3" actId="14100"/>
           <ac:spMkLst>
@@ -166,6 +189,38 @@
             <pc:docMk/>
             <pc:sldMk cId="0" sldId="257"/>
             <ac:spMk id="28" creationId="{00000000-0000-0000-0000-000000000000}"/>
+          </ac:spMkLst>
+        </pc:spChg>
+        <pc:spChg chg="mod">
+          <ac:chgData name="Amogh Nagri" userId="0296a5a14be49074" providerId="LiveId" clId="{08A3EB59-B37B-482F-9A7F-8E1D5E91179F}" dt="2026-09-05T13:21:32.100" v="8" actId="1076"/>
+          <ac:spMkLst>
+            <pc:docMk/>
+            <pc:sldMk cId="0" sldId="257"/>
+            <ac:spMk id="35" creationId="{00000000-0000-0000-0000-000000000000}"/>
+          </ac:spMkLst>
+        </pc:spChg>
+        <pc:spChg chg="mod">
+          <ac:chgData name="Amogh Nagri" userId="0296a5a14be49074" providerId="LiveId" clId="{08A3EB59-B37B-482F-9A7F-8E1D5E91179F}" dt="2026-09-05T13:21:34.553" v="9" actId="1076"/>
+          <ac:spMkLst>
+            <pc:docMk/>
+            <pc:sldMk cId="0" sldId="257"/>
+            <ac:spMk id="36" creationId="{00000000-0000-0000-0000-000000000000}"/>
+          </ac:spMkLst>
+        </pc:spChg>
+        <pc:spChg chg="mod">
+          <ac:chgData name="Amogh Nagri" userId="0296a5a14be49074" providerId="LiveId" clId="{08A3EB59-B37B-482F-9A7F-8E1D5E91179F}" dt="2026-09-05T13:21:53.301" v="10" actId="1076"/>
+          <ac:spMkLst>
+            <pc:docMk/>
+            <pc:sldMk cId="0" sldId="257"/>
+            <ac:spMk id="37" creationId="{00000000-0000-0000-0000-000000000000}"/>
+          </ac:spMkLst>
+        </pc:spChg>
+        <pc:spChg chg="mod">
+          <ac:chgData name="Amogh Nagri" userId="0296a5a14be49074" providerId="LiveId" clId="{08A3EB59-B37B-482F-9A7F-8E1D5E91179F}" dt="2026-09-05T13:22:00.336" v="12" actId="1076"/>
+          <ac:spMkLst>
+            <pc:docMk/>
+            <pc:sldMk cId="0" sldId="257"/>
+            <ac:spMk id="38" creationId="{00000000-0000-0000-0000-000000000000}"/>
           </ac:spMkLst>
         </pc:spChg>
       </pc:sldChg>
@@ -1950,7 +2005,7 @@
         </p:nvSpPr>
         <p:spPr>
           <a:xfrm>
-            <a:off x="4581144" y="5138928"/>
+            <a:off x="4582668" y="5138928"/>
             <a:ext cx="3026664" cy="256032"/>
           </a:xfrm>
           <a:prstGeom prst="rect">
@@ -2397,7 +2452,7 @@
         </p:nvSpPr>
         <p:spPr>
           <a:xfrm>
-            <a:off x="9326880" y="1481328"/>
+            <a:off x="9326880" y="1449324"/>
             <a:ext cx="2377440" cy="3502152"/>
           </a:xfrm>
           <a:prstGeom prst="roundRect">
@@ -3548,7 +3603,7 @@
         </p:nvSpPr>
         <p:spPr>
           <a:xfrm>
-            <a:off x="6345936" y="4041648"/>
+            <a:off x="6336792" y="3860261"/>
             <a:ext cx="2505456" cy="658368"/>
           </a:xfrm>
           <a:prstGeom prst="rect">
@@ -3590,7 +3645,7 @@
         </p:nvSpPr>
         <p:spPr>
           <a:xfrm>
-            <a:off x="6345936" y="4626864"/>
+            <a:off x="6345936" y="4452195"/>
             <a:ext cx="2505456" cy="310896"/>
           </a:xfrm>
           <a:prstGeom prst="rect">
@@ -3632,7 +3687,7 @@
         </p:nvSpPr>
         <p:spPr>
           <a:xfrm>
-            <a:off x="9546336" y="2048256"/>
+            <a:off x="9537192" y="1975104"/>
             <a:ext cx="1956816" cy="2331720"/>
           </a:xfrm>
           <a:prstGeom prst="rect">
@@ -3798,7 +3853,7 @@
         </p:nvSpPr>
         <p:spPr>
           <a:xfrm>
-            <a:off x="9546336" y="4443984"/>
+            <a:off x="9546336" y="4425696"/>
             <a:ext cx="1956816" cy="402336"/>
           </a:xfrm>
           <a:prstGeom prst="rect">
